--- a/chapter1/parts/part-07-dataset-management/clip.pptx
+++ b/chapter1/parts/part-07-dataset-management/clip.pptx
@@ -4184,10 +4184,12 @@
           </a:bodyPr>
           <a:lstStyle/>
           <a:p>
-            <a:pPr>
+            <a:pPr lvl="0" marL="457200" indent="-228600">
+              <a:buFont typeface="Calibri"/>
               <a:spcAft>
                 <a:spcPts val="1000"/>
               </a:spcAft>
+              <a:buSzPct val="100000"/>
               <a:buChar char="•"/>
               <a:lnSpc>
                 <a:spcPts val="2200"/>
@@ -4204,10 +4206,12 @@
             </a:r>
           </a:p>
           <a:p>
-            <a:pPr>
+            <a:pPr lvl="0" marL="457200" indent="-228600">
+              <a:buFont typeface="Calibri"/>
               <a:spcAft>
                 <a:spcPts val="1000"/>
               </a:spcAft>
+              <a:buSzPct val="100000"/>
               <a:buChar char="•"/>
               <a:lnSpc>
                 <a:spcPts val="2200"/>
@@ -4343,10 +4347,12 @@
           </a:bodyPr>
           <a:lstStyle/>
           <a:p>
-            <a:pPr>
+            <a:pPr lvl="0" marL="457200" indent="-228600">
+              <a:buFont typeface="Calibri"/>
               <a:spcAft>
                 <a:spcPts val="1000"/>
               </a:spcAft>
+              <a:buSzPct val="100000"/>
               <a:buChar char="•"/>
               <a:lnSpc>
                 <a:spcPts val="2200"/>
@@ -4363,10 +4369,12 @@
             </a:r>
           </a:p>
           <a:p>
-            <a:pPr>
+            <a:pPr lvl="0" marL="457200" indent="-228600">
+              <a:buFont typeface="Calibri"/>
               <a:spcAft>
                 <a:spcPts val="1000"/>
               </a:spcAft>
+              <a:buSzPct val="100000"/>
               <a:buChar char="•"/>
               <a:lnSpc>
                 <a:spcPts val="2200"/>
@@ -4383,10 +4391,12 @@
             </a:r>
           </a:p>
           <a:p>
-            <a:pPr>
+            <a:pPr lvl="0" marL="457200" indent="-228600">
+              <a:buFont typeface="Calibri"/>
               <a:spcAft>
                 <a:spcPts val="1000"/>
               </a:spcAft>
+              <a:buSzPct val="100000"/>
               <a:buChar char="•"/>
               <a:lnSpc>
                 <a:spcPts val="2200"/>
@@ -4522,10 +4532,12 @@
           </a:bodyPr>
           <a:lstStyle/>
           <a:p>
-            <a:pPr>
+            <a:pPr lvl="0" marL="457200" indent="-228600">
+              <a:buFont typeface="Calibri"/>
               <a:spcAft>
                 <a:spcPts val="1000"/>
               </a:spcAft>
+              <a:buSzPct val="100000"/>
               <a:buChar char="•"/>
               <a:lnSpc>
                 <a:spcPts val="2200"/>
@@ -4542,10 +4554,12 @@
             </a:r>
           </a:p>
           <a:p>
-            <a:pPr>
+            <a:pPr lvl="0" marL="457200" indent="-228600">
+              <a:buFont typeface="Calibri"/>
               <a:spcAft>
                 <a:spcPts val="1000"/>
               </a:spcAft>
+              <a:buSzPct val="100000"/>
               <a:buChar char="•"/>
               <a:lnSpc>
                 <a:spcPts val="2200"/>
@@ -4681,10 +4695,12 @@
           </a:bodyPr>
           <a:lstStyle/>
           <a:p>
-            <a:pPr>
+            <a:pPr lvl="0" marL="457200" indent="-228600">
+              <a:buFont typeface="Calibri"/>
               <a:spcAft>
                 <a:spcPts val="1000"/>
               </a:spcAft>
+              <a:buSzPct val="100000"/>
               <a:buChar char="•"/>
               <a:lnSpc>
                 <a:spcPts val="2200"/>
@@ -4701,10 +4717,12 @@
             </a:r>
           </a:p>
           <a:p>
-            <a:pPr>
+            <a:pPr lvl="0" marL="457200" indent="-228600">
+              <a:buFont typeface="Calibri"/>
               <a:spcAft>
                 <a:spcPts val="1000"/>
               </a:spcAft>
+              <a:buSzPct val="100000"/>
               <a:buChar char="•"/>
               <a:lnSpc>
                 <a:spcPts val="2200"/>
@@ -4721,10 +4739,12 @@
             </a:r>
           </a:p>
           <a:p>
-            <a:pPr>
+            <a:pPr lvl="0" marL="457200" indent="-228600">
+              <a:buFont typeface="Calibri"/>
               <a:spcAft>
                 <a:spcPts val="1000"/>
               </a:spcAft>
+              <a:buSzPct val="100000"/>
               <a:buChar char="•"/>
               <a:lnSpc>
                 <a:spcPts val="2200"/>
@@ -4860,10 +4880,12 @@
           </a:bodyPr>
           <a:lstStyle/>
           <a:p>
-            <a:pPr>
+            <a:pPr lvl="0" marL="457200" indent="-228600">
+              <a:buFont typeface="Calibri"/>
               <a:spcAft>
                 <a:spcPts val="1000"/>
               </a:spcAft>
+              <a:buSzPct val="100000"/>
               <a:buChar char="•"/>
               <a:lnSpc>
                 <a:spcPts val="2200"/>
@@ -4880,10 +4902,12 @@
             </a:r>
           </a:p>
           <a:p>
-            <a:pPr>
+            <a:pPr lvl="0" marL="457200" indent="-228600">
+              <a:buFont typeface="Calibri"/>
               <a:spcAft>
                 <a:spcPts val="1000"/>
               </a:spcAft>
+              <a:buSzPct val="100000"/>
               <a:buChar char="•"/>
               <a:lnSpc>
                 <a:spcPts val="2200"/>
@@ -5019,10 +5043,12 @@
           </a:bodyPr>
           <a:lstStyle/>
           <a:p>
-            <a:pPr>
+            <a:pPr lvl="0" marL="457200" indent="-228600">
+              <a:buFont typeface="Calibri"/>
               <a:spcAft>
                 <a:spcPts val="1000"/>
               </a:spcAft>
+              <a:buSzPct val="100000"/>
               <a:buChar char="•"/>
               <a:lnSpc>
                 <a:spcPts val="2200"/>
@@ -5039,10 +5065,12 @@
             </a:r>
           </a:p>
           <a:p>
-            <a:pPr>
+            <a:pPr lvl="0" marL="457200" indent="-228600">
+              <a:buFont typeface="Calibri"/>
               <a:spcAft>
                 <a:spcPts val="1000"/>
               </a:spcAft>
+              <a:buSzPct val="100000"/>
               <a:buChar char="•"/>
               <a:lnSpc>
                 <a:spcPts val="2200"/>
@@ -5059,10 +5087,12 @@
             </a:r>
           </a:p>
           <a:p>
-            <a:pPr>
+            <a:pPr lvl="0" marL="457200" indent="-228600">
+              <a:buFont typeface="Calibri"/>
               <a:spcAft>
                 <a:spcPts val="1000"/>
               </a:spcAft>
+              <a:buSzPct val="100000"/>
               <a:buChar char="•"/>
               <a:lnSpc>
                 <a:spcPts val="2200"/>
@@ -5198,10 +5228,12 @@
           </a:bodyPr>
           <a:lstStyle/>
           <a:p>
-            <a:pPr>
+            <a:pPr lvl="0" marL="457200" indent="-228600">
+              <a:buFont typeface="Calibri"/>
               <a:spcAft>
                 <a:spcPts val="1000"/>
               </a:spcAft>
+              <a:buSzPct val="100000"/>
               <a:buChar char="•"/>
               <a:lnSpc>
                 <a:spcPts val="2200"/>
@@ -5218,10 +5250,12 @@
             </a:r>
           </a:p>
           <a:p>
-            <a:pPr>
+            <a:pPr lvl="0" marL="457200" indent="-228600">
+              <a:buFont typeface="Calibri"/>
               <a:spcAft>
                 <a:spcPts val="1000"/>
               </a:spcAft>
+              <a:buSzPct val="100000"/>
               <a:buChar char="•"/>
               <a:lnSpc>
                 <a:spcPts val="2200"/>
